--- a/Proyecto/Presentaciones/SSanchez_Avance_5.pptx
+++ b/Proyecto/Presentaciones/SSanchez_Avance_5.pptx
@@ -11,10 +11,10 @@
     <p:sldId id="256" r:id="rId2"/>
     <p:sldId id="257" r:id="rId3"/>
     <p:sldId id="268" r:id="rId4"/>
-    <p:sldId id="291" r:id="rId5"/>
-    <p:sldId id="292" r:id="rId6"/>
-    <p:sldId id="293" r:id="rId7"/>
-    <p:sldId id="294" r:id="rId8"/>
+    <p:sldId id="292" r:id="rId5"/>
+    <p:sldId id="294" r:id="rId6"/>
+    <p:sldId id="295" r:id="rId7"/>
+    <p:sldId id="293" r:id="rId8"/>
     <p:sldId id="280" r:id="rId9"/>
   </p:sldIdLst>
   <p:sldSz cx="12192000" cy="6858000"/>
@@ -204,7 +204,7 @@
           <a:p>
             <a:fld id="{2FA9350F-2939-4458-8D71-3F15E74601A9}" type="datetimeFigureOut">
               <a:rPr lang="es-ES" smtClean="0"/>
-              <a:t>22/05/2026</a:t>
+              <a:t>26/05/2026</a:t>
             </a:fld>
             <a:endParaRPr lang="es-ES"/>
           </a:p>
@@ -618,7 +618,7 @@
           <a:p>
             <a:fld id="{BE56174E-6725-4DA7-9A8F-10708BCA6C53}" type="datetime1">
               <a:rPr lang="es-ES" smtClean="0"/>
-              <a:t>22/05/2026</a:t>
+              <a:t>26/05/2026</a:t>
             </a:fld>
             <a:endParaRPr lang="es-ES"/>
           </a:p>
@@ -816,7 +816,7 @@
           <a:p>
             <a:fld id="{D936CC12-3AAD-493A-B056-FC6E58CED972}" type="datetime1">
               <a:rPr lang="es-ES" smtClean="0"/>
-              <a:t>22/05/2026</a:t>
+              <a:t>26/05/2026</a:t>
             </a:fld>
             <a:endParaRPr lang="es-ES"/>
           </a:p>
@@ -1024,7 +1024,7 @@
           <a:p>
             <a:fld id="{64C15989-7D34-4CB0-BE8D-094F4093C5BE}" type="datetime1">
               <a:rPr lang="es-ES" smtClean="0"/>
-              <a:t>22/05/2026</a:t>
+              <a:t>26/05/2026</a:t>
             </a:fld>
             <a:endParaRPr lang="es-ES"/>
           </a:p>
@@ -1222,7 +1222,7 @@
           <a:p>
             <a:fld id="{C8E6AE57-678C-4474-BCAF-A1C1D01D9923}" type="datetime1">
               <a:rPr lang="es-ES" smtClean="0"/>
-              <a:t>22/05/2026</a:t>
+              <a:t>26/05/2026</a:t>
             </a:fld>
             <a:endParaRPr lang="es-ES"/>
           </a:p>
@@ -1497,7 +1497,7 @@
           <a:p>
             <a:fld id="{B65444EE-D81E-4C7F-A938-20181987BA6B}" type="datetime1">
               <a:rPr lang="es-ES" smtClean="0"/>
-              <a:t>22/05/2026</a:t>
+              <a:t>26/05/2026</a:t>
             </a:fld>
             <a:endParaRPr lang="es-ES"/>
           </a:p>
@@ -1762,7 +1762,7 @@
           <a:p>
             <a:fld id="{DB7FAF70-6DC3-49DB-8469-3FD7C3DF5C2E}" type="datetime1">
               <a:rPr lang="es-ES" smtClean="0"/>
-              <a:t>22/05/2026</a:t>
+              <a:t>26/05/2026</a:t>
             </a:fld>
             <a:endParaRPr lang="es-ES"/>
           </a:p>
@@ -2174,7 +2174,7 @@
           <a:p>
             <a:fld id="{18FABBE8-6FAC-4BD3-965B-CE24F796E336}" type="datetime1">
               <a:rPr lang="es-ES" smtClean="0"/>
-              <a:t>22/05/2026</a:t>
+              <a:t>26/05/2026</a:t>
             </a:fld>
             <a:endParaRPr lang="es-ES"/>
           </a:p>
@@ -2315,7 +2315,7 @@
           <a:p>
             <a:fld id="{B7DC02F9-238F-4FB1-8B2A-D4A4337555AF}" type="datetime1">
               <a:rPr lang="es-ES" smtClean="0"/>
-              <a:t>22/05/2026</a:t>
+              <a:t>26/05/2026</a:t>
             </a:fld>
             <a:endParaRPr lang="es-ES"/>
           </a:p>
@@ -2428,7 +2428,7 @@
           <a:p>
             <a:fld id="{0198BAA2-4E3A-4749-9C95-C97D8416C792}" type="datetime1">
               <a:rPr lang="es-ES" smtClean="0"/>
-              <a:t>22/05/2026</a:t>
+              <a:t>26/05/2026</a:t>
             </a:fld>
             <a:endParaRPr lang="es-ES"/>
           </a:p>
@@ -2739,7 +2739,7 @@
           <a:p>
             <a:fld id="{37BCFCA8-6CCF-4D46-B1C6-78E050CA5BBC}" type="datetime1">
               <a:rPr lang="es-ES" smtClean="0"/>
-              <a:t>22/05/2026</a:t>
+              <a:t>26/05/2026</a:t>
             </a:fld>
             <a:endParaRPr lang="es-ES"/>
           </a:p>
@@ -3027,7 +3027,7 @@
           <a:p>
             <a:fld id="{8AA2B887-773C-4083-9C59-A03E7CE6E670}" type="datetime1">
               <a:rPr lang="es-ES" smtClean="0"/>
-              <a:t>22/05/2026</a:t>
+              <a:t>26/05/2026</a:t>
             </a:fld>
             <a:endParaRPr lang="es-ES"/>
           </a:p>
@@ -3268,7 +3268,7 @@
           <a:p>
             <a:fld id="{34307928-303A-499E-B86C-8D170FB3D7EF}" type="datetime1">
               <a:rPr lang="es-ES" smtClean="0"/>
-              <a:t>22/05/2026</a:t>
+              <a:t>26/05/2026</a:t>
             </a:fld>
             <a:endParaRPr lang="es-ES"/>
           </a:p>
@@ -4157,172 +4157,6 @@
           <p:cNvPr id="2" name="Título 1">
             <a:extLst>
               <a:ext uri="{FF2B5EF4-FFF2-40B4-BE49-F238E27FC236}">
-                <a16:creationId xmlns:a16="http://schemas.microsoft.com/office/drawing/2014/main" id="{DBA721CD-803E-D416-0996-F7916D658DC8}"/>
-              </a:ext>
-            </a:extLst>
-          </p:cNvPr>
-          <p:cNvSpPr>
-            <a:spLocks noGrp="1"/>
-          </p:cNvSpPr>
-          <p:nvPr>
-            <p:ph type="title"/>
-          </p:nvPr>
-        </p:nvSpPr>
-        <p:spPr/>
-        <p:txBody>
-          <a:bodyPr/>
-          <a:lstStyle/>
-          <a:p>
-            <a:r>
-              <a:rPr lang="es-ES" dirty="0"/>
-              <a:t>Mediciones DC ESP32 pre calibración</a:t>
-            </a:r>
-          </a:p>
-        </p:txBody>
-      </p:sp>
-      <p:sp>
-        <p:nvSpPr>
-          <p:cNvPr id="3" name="Marcador de contenido 2">
-            <a:extLst>
-              <a:ext uri="{FF2B5EF4-FFF2-40B4-BE49-F238E27FC236}">
-                <a16:creationId xmlns:a16="http://schemas.microsoft.com/office/drawing/2014/main" id="{B155A275-B6B9-0ED2-AB20-F1A3C0475803}"/>
-              </a:ext>
-            </a:extLst>
-          </p:cNvPr>
-          <p:cNvSpPr>
-            <a:spLocks noGrp="1"/>
-          </p:cNvSpPr>
-          <p:nvPr>
-            <p:ph idx="1"/>
-          </p:nvPr>
-        </p:nvSpPr>
-        <p:spPr/>
-        <p:txBody>
-          <a:bodyPr/>
-          <a:lstStyle/>
-          <a:p>
-            <a:pPr marL="0" indent="0">
-              <a:buNone/>
-            </a:pPr>
-            <a:endParaRPr lang="es-ES" dirty="0"/>
-          </a:p>
-        </p:txBody>
-      </p:sp>
-      <p:sp>
-        <p:nvSpPr>
-          <p:cNvPr id="4" name="Marcador de pie de página 3">
-            <a:extLst>
-              <a:ext uri="{FF2B5EF4-FFF2-40B4-BE49-F238E27FC236}">
-                <a16:creationId xmlns:a16="http://schemas.microsoft.com/office/drawing/2014/main" id="{5430572C-1F59-C0E6-89C6-34B5206B80E2}"/>
-              </a:ext>
-            </a:extLst>
-          </p:cNvPr>
-          <p:cNvSpPr>
-            <a:spLocks noGrp="1"/>
-          </p:cNvSpPr>
-          <p:nvPr>
-            <p:ph type="ftr" sz="quarter" idx="11"/>
-          </p:nvPr>
-        </p:nvSpPr>
-        <p:spPr>
-          <a:xfrm>
-            <a:off x="838200" y="6388100"/>
-            <a:ext cx="8043333" cy="365125"/>
-          </a:xfrm>
-        </p:spPr>
-        <p:txBody>
-          <a:bodyPr/>
-          <a:lstStyle/>
-          <a:p>
-            <a:r>
-              <a:rPr lang="es-ES" dirty="0"/>
-              <a:t>Bosquejo de como usar </a:t>
-            </a:r>
-            <a:r>
-              <a:rPr lang="es-ES" dirty="0" err="1"/>
-              <a:t>timers</a:t>
-            </a:r>
-            <a:r>
-              <a:rPr lang="es-ES" dirty="0"/>
-              <a:t>: </a:t>
-            </a:r>
-            <a:r>
-              <a:rPr lang="es-ES" dirty="0">
-                <a:hlinkClick r:id="rId2"/>
-              </a:rPr>
-              <a:t>https://circuitdigest.com/microcontroller-projects/esp32-timers-and-timer-interrupts</a:t>
-            </a:r>
-            <a:r>
-              <a:rPr lang="es-ES" dirty="0"/>
-              <a:t> </a:t>
-            </a:r>
-          </a:p>
-        </p:txBody>
-      </p:sp>
-      <p:sp>
-        <p:nvSpPr>
-          <p:cNvPr id="5" name="Marcador de número de diapositiva 4">
-            <a:extLst>
-              <a:ext uri="{FF2B5EF4-FFF2-40B4-BE49-F238E27FC236}">
-                <a16:creationId xmlns:a16="http://schemas.microsoft.com/office/drawing/2014/main" id="{C6DD326E-E873-ECBB-EE88-182221BE7FFC}"/>
-              </a:ext>
-            </a:extLst>
-          </p:cNvPr>
-          <p:cNvSpPr>
-            <a:spLocks noGrp="1"/>
-          </p:cNvSpPr>
-          <p:nvPr>
-            <p:ph type="sldNum" sz="quarter" idx="12"/>
-          </p:nvPr>
-        </p:nvSpPr>
-        <p:spPr/>
-        <p:txBody>
-          <a:bodyPr/>
-          <a:lstStyle/>
-          <a:p>
-            <a:fld id="{E725A04B-6C01-430F-BBE6-0BFF217C666F}" type="slidenum">
-              <a:rPr lang="es-ES" smtClean="0"/>
-              <a:t>4</a:t>
-            </a:fld>
-            <a:endParaRPr lang="es-ES"/>
-          </a:p>
-        </p:txBody>
-      </p:sp>
-    </p:spTree>
-    <p:extLst>
-      <p:ext uri="{BB962C8B-B14F-4D97-AF65-F5344CB8AC3E}">
-        <p14:creationId xmlns:p14="http://schemas.microsoft.com/office/powerpoint/2010/main" val="1403148672"/>
-      </p:ext>
-    </p:extLst>
-  </p:cSld>
-  <p:clrMapOvr>
-    <a:masterClrMapping/>
-  </p:clrMapOvr>
-</p:sld>
-</file>
-
-<file path=ppt/slides/slide5.xml><?xml version="1.0" encoding="utf-8"?>
-<p:sld xmlns:a="http://schemas.openxmlformats.org/drawingml/2006/main" xmlns:r="http://schemas.openxmlformats.org/officeDocument/2006/relationships" xmlns:p="http://schemas.openxmlformats.org/presentationml/2006/main">
-  <p:cSld>
-    <p:spTree>
-      <p:nvGrpSpPr>
-        <p:cNvPr id="1" name=""/>
-        <p:cNvGrpSpPr/>
-        <p:nvPr/>
-      </p:nvGrpSpPr>
-      <p:grpSpPr>
-        <a:xfrm>
-          <a:off x="0" y="0"/>
-          <a:ext cx="0" cy="0"/>
-          <a:chOff x="0" y="0"/>
-          <a:chExt cx="0" cy="0"/>
-        </a:xfrm>
-      </p:grpSpPr>
-      <p:sp>
-        <p:nvSpPr>
-          <p:cNvPr id="2" name="Título 1">
-            <a:extLst>
-              <a:ext uri="{FF2B5EF4-FFF2-40B4-BE49-F238E27FC236}">
                 <a16:creationId xmlns:a16="http://schemas.microsoft.com/office/drawing/2014/main" id="{4871F31F-5B0A-F9B3-F1EA-6DB50A3C3ADB}"/>
               </a:ext>
             </a:extLst>
@@ -4384,15 +4218,9 @@
             <a:endParaRPr lang="es-ES" dirty="0"/>
           </a:p>
           <a:p>
-            <a:endParaRPr lang="es-ES" dirty="0"/>
-          </a:p>
-          <a:p>
-            <a:r>
-              <a:rPr lang="es-ES" dirty="0"/>
-              <a:t>STM32: Acceso mediante ADC</a:t>
-            </a:r>
-          </a:p>
-          <a:p>
+            <a:pPr marL="0" indent="0">
+              <a:buNone/>
+            </a:pPr>
             <a:endParaRPr lang="es-ES" dirty="0"/>
           </a:p>
         </p:txBody>
@@ -4445,7 +4273,7 @@
           <a:p>
             <a:fld id="{E725A04B-6C01-430F-BBE6-0BFF217C666F}" type="slidenum">
               <a:rPr lang="es-ES" smtClean="0"/>
-              <a:t>5</a:t>
+              <a:t>4</a:t>
             </a:fld>
             <a:endParaRPr lang="es-ES"/>
           </a:p>
@@ -4494,6 +4322,234 @@
 </p:sld>
 </file>
 
+<file path=ppt/slides/slide5.xml><?xml version="1.0" encoding="utf-8"?>
+<p:sld xmlns:a="http://schemas.openxmlformats.org/drawingml/2006/main" xmlns:r="http://schemas.openxmlformats.org/officeDocument/2006/relationships" xmlns:p="http://schemas.openxmlformats.org/presentationml/2006/main">
+  <p:cSld>
+    <p:spTree>
+      <p:nvGrpSpPr>
+        <p:cNvPr id="1" name=""/>
+        <p:cNvGrpSpPr/>
+        <p:nvPr/>
+      </p:nvGrpSpPr>
+      <p:grpSpPr>
+        <a:xfrm>
+          <a:off x="0" y="0"/>
+          <a:ext cx="0" cy="0"/>
+          <a:chOff x="0" y="0"/>
+          <a:chExt cx="0" cy="0"/>
+        </a:xfrm>
+      </p:grpSpPr>
+      <p:sp>
+        <p:nvSpPr>
+          <p:cNvPr id="2" name="Título 1">
+            <a:extLst>
+              <a:ext uri="{FF2B5EF4-FFF2-40B4-BE49-F238E27FC236}">
+                <a16:creationId xmlns:a16="http://schemas.microsoft.com/office/drawing/2014/main" id="{6F3AD076-E7AD-D35A-004B-30E6CDAC739F}"/>
+              </a:ext>
+            </a:extLst>
+          </p:cNvPr>
+          <p:cNvSpPr>
+            <a:spLocks noGrp="1"/>
+          </p:cNvSpPr>
+          <p:nvPr>
+            <p:ph type="title"/>
+          </p:nvPr>
+        </p:nvSpPr>
+        <p:spPr/>
+        <p:txBody>
+          <a:bodyPr/>
+          <a:lstStyle/>
+          <a:p>
+            <a:r>
+              <a:rPr lang="es-ES" dirty="0"/>
+              <a:t>Sensor temperatura STM32</a:t>
+            </a:r>
+          </a:p>
+        </p:txBody>
+      </p:sp>
+      <p:sp>
+        <p:nvSpPr>
+          <p:cNvPr id="3" name="Marcador de contenido 2">
+            <a:extLst>
+              <a:ext uri="{FF2B5EF4-FFF2-40B4-BE49-F238E27FC236}">
+                <a16:creationId xmlns:a16="http://schemas.microsoft.com/office/drawing/2014/main" id="{3A8303D3-B49C-E130-1306-99491EF3ED81}"/>
+              </a:ext>
+            </a:extLst>
+          </p:cNvPr>
+          <p:cNvSpPr>
+            <a:spLocks noGrp="1"/>
+          </p:cNvSpPr>
+          <p:nvPr>
+            <p:ph idx="1"/>
+          </p:nvPr>
+        </p:nvSpPr>
+        <p:spPr>
+          <a:xfrm>
+            <a:off x="838200" y="1825625"/>
+            <a:ext cx="5162384" cy="4351338"/>
+          </a:xfrm>
+        </p:spPr>
+        <p:txBody>
+          <a:bodyPr/>
+          <a:lstStyle/>
+          <a:p>
+            <a:r>
+              <a:rPr lang="es-ES" dirty="0"/>
+              <a:t>Acceso mediante ADC1</a:t>
+            </a:r>
+          </a:p>
+          <a:p>
+            <a:r>
+              <a:rPr lang="es-ES" dirty="0"/>
+              <a:t>Necesario aumentar el </a:t>
+            </a:r>
+            <a:r>
+              <a:rPr lang="es-ES" dirty="0" err="1"/>
+              <a:t>sample</a:t>
+            </a:r>
+            <a:r>
+              <a:rPr lang="es-ES" dirty="0"/>
+              <a:t> time a lo mayor posible para disminuir errores</a:t>
+            </a:r>
+          </a:p>
+          <a:p>
+            <a:endParaRPr lang="es-ES" dirty="0"/>
+          </a:p>
+        </p:txBody>
+      </p:sp>
+      <p:sp>
+        <p:nvSpPr>
+          <p:cNvPr id="4" name="Marcador de pie de página 3">
+            <a:extLst>
+              <a:ext uri="{FF2B5EF4-FFF2-40B4-BE49-F238E27FC236}">
+                <a16:creationId xmlns:a16="http://schemas.microsoft.com/office/drawing/2014/main" id="{82C631FA-9B4B-A1BC-62BE-84B103E7CFB0}"/>
+              </a:ext>
+            </a:extLst>
+          </p:cNvPr>
+          <p:cNvSpPr>
+            <a:spLocks noGrp="1"/>
+          </p:cNvSpPr>
+          <p:nvPr>
+            <p:ph type="ftr" sz="quarter" idx="11"/>
+          </p:nvPr>
+        </p:nvSpPr>
+        <p:spPr/>
+        <p:txBody>
+          <a:bodyPr/>
+          <a:lstStyle/>
+          <a:p>
+            <a:endParaRPr lang="es-ES"/>
+          </a:p>
+        </p:txBody>
+      </p:sp>
+      <p:sp>
+        <p:nvSpPr>
+          <p:cNvPr id="5" name="Marcador de número de diapositiva 4">
+            <a:extLst>
+              <a:ext uri="{FF2B5EF4-FFF2-40B4-BE49-F238E27FC236}">
+                <a16:creationId xmlns:a16="http://schemas.microsoft.com/office/drawing/2014/main" id="{51BD6D32-74DB-F0D1-3663-F24A9D10693A}"/>
+              </a:ext>
+            </a:extLst>
+          </p:cNvPr>
+          <p:cNvSpPr>
+            <a:spLocks noGrp="1"/>
+          </p:cNvSpPr>
+          <p:nvPr>
+            <p:ph type="sldNum" sz="quarter" idx="12"/>
+          </p:nvPr>
+        </p:nvSpPr>
+        <p:spPr/>
+        <p:txBody>
+          <a:bodyPr/>
+          <a:lstStyle/>
+          <a:p>
+            <a:fld id="{E725A04B-6C01-430F-BBE6-0BFF217C666F}" type="slidenum">
+              <a:rPr lang="es-ES" smtClean="0"/>
+              <a:t>5</a:t>
+            </a:fld>
+            <a:endParaRPr lang="es-ES"/>
+          </a:p>
+        </p:txBody>
+      </p:sp>
+      <p:pic>
+        <p:nvPicPr>
+          <p:cNvPr id="7" name="Imagen 6">
+            <a:extLst>
+              <a:ext uri="{FF2B5EF4-FFF2-40B4-BE49-F238E27FC236}">
+                <a16:creationId xmlns:a16="http://schemas.microsoft.com/office/drawing/2014/main" id="{420C78A2-7333-FA24-55F4-0CD215559BEB}"/>
+              </a:ext>
+            </a:extLst>
+          </p:cNvPr>
+          <p:cNvPicPr>
+            <a:picLocks noChangeAspect="1"/>
+          </p:cNvPicPr>
+          <p:nvPr/>
+        </p:nvPicPr>
+        <p:blipFill>
+          <a:blip r:embed="rId2"/>
+          <a:stretch>
+            <a:fillRect/>
+          </a:stretch>
+        </p:blipFill>
+        <p:spPr>
+          <a:xfrm>
+            <a:off x="6330314" y="1580869"/>
+            <a:ext cx="4838366" cy="1848131"/>
+          </a:xfrm>
+          <a:prstGeom prst="rect">
+            <a:avLst/>
+          </a:prstGeom>
+        </p:spPr>
+      </p:pic>
+      <p:pic>
+        <p:nvPicPr>
+          <p:cNvPr id="9" name="Imagen 8">
+            <a:extLst>
+              <a:ext uri="{FF2B5EF4-FFF2-40B4-BE49-F238E27FC236}">
+                <a16:creationId xmlns:a16="http://schemas.microsoft.com/office/drawing/2014/main" id="{2EC8897E-0AB1-2677-8AF5-45D66DBC84F3}"/>
+              </a:ext>
+            </a:extLst>
+          </p:cNvPr>
+          <p:cNvPicPr>
+            <a:picLocks noChangeAspect="1"/>
+          </p:cNvPicPr>
+          <p:nvPr/>
+        </p:nvPicPr>
+        <p:blipFill>
+          <a:blip r:embed="rId3">
+            <a:extLst>
+              <a:ext uri="{28A0092B-C50C-407E-A947-70E740481C1C}">
+                <a14:useLocalDpi xmlns:a14="http://schemas.microsoft.com/office/drawing/2010/main" val="0"/>
+              </a:ext>
+            </a:extLst>
+          </a:blip>
+          <a:stretch>
+            <a:fillRect/>
+          </a:stretch>
+        </p:blipFill>
+        <p:spPr>
+          <a:xfrm>
+            <a:off x="6191418" y="3643394"/>
+            <a:ext cx="4842848" cy="3026780"/>
+          </a:xfrm>
+          <a:prstGeom prst="rect">
+            <a:avLst/>
+          </a:prstGeom>
+        </p:spPr>
+      </p:pic>
+    </p:spTree>
+    <p:extLst>
+      <p:ext uri="{BB962C8B-B14F-4D97-AF65-F5344CB8AC3E}">
+        <p14:creationId xmlns:p14="http://schemas.microsoft.com/office/powerpoint/2010/main" val="3617959338"/>
+      </p:ext>
+    </p:extLst>
+  </p:cSld>
+  <p:clrMapOvr>
+    <a:masterClrMapping/>
+  </p:clrMapOvr>
+</p:sld>
+</file>
+
 <file path=ppt/slides/slide6.xml><?xml version="1.0" encoding="utf-8"?>
 <p:sld xmlns:a="http://schemas.openxmlformats.org/drawingml/2006/main" xmlns:r="http://schemas.openxmlformats.org/officeDocument/2006/relationships" xmlns:p="http://schemas.openxmlformats.org/presentationml/2006/main">
   <p:cSld>
@@ -4516,7 +4572,7 @@
           <p:cNvPr id="2" name="Título 1">
             <a:extLst>
               <a:ext uri="{FF2B5EF4-FFF2-40B4-BE49-F238E27FC236}">
-                <a16:creationId xmlns:a16="http://schemas.microsoft.com/office/drawing/2014/main" id="{B0D9EA71-C5CF-03D7-9312-C0F67B0ADC0D}"/>
+                <a16:creationId xmlns:a16="http://schemas.microsoft.com/office/drawing/2014/main" id="{726BD68D-B64B-0403-5D67-CE96A447AC5B}"/>
               </a:ext>
             </a:extLst>
           </p:cNvPr>
@@ -4534,25 +4590,25 @@
           <a:p>
             <a:r>
               <a:rPr lang="es-ES" dirty="0"/>
-              <a:t>Mediciones AC ESP32</a:t>
-            </a:r>
-          </a:p>
-        </p:txBody>
-      </p:sp>
-      <p:sp>
-        <p:nvSpPr>
-          <p:cNvPr id="3" name="Marcador de contenido 2">
-            <a:extLst>
-              <a:ext uri="{FF2B5EF4-FFF2-40B4-BE49-F238E27FC236}">
-                <a16:creationId xmlns:a16="http://schemas.microsoft.com/office/drawing/2014/main" id="{F3CED1CC-E5CF-5EC3-1FD8-F7A25D634110}"/>
-              </a:ext>
-            </a:extLst>
-          </p:cNvPr>
-          <p:cNvSpPr>
-            <a:spLocks noGrp="1"/>
-          </p:cNvSpPr>
-          <p:nvPr>
-            <p:ph idx="1"/>
+              <a:t>Comparativa STM32 Métricas DC</a:t>
+            </a:r>
+          </a:p>
+        </p:txBody>
+      </p:sp>
+      <p:sp>
+        <p:nvSpPr>
+          <p:cNvPr id="4" name="Marcador de pie de página 3">
+            <a:extLst>
+              <a:ext uri="{FF2B5EF4-FFF2-40B4-BE49-F238E27FC236}">
+                <a16:creationId xmlns:a16="http://schemas.microsoft.com/office/drawing/2014/main" id="{26031F30-C69E-C3FF-D708-0441EE104245}"/>
+              </a:ext>
+            </a:extLst>
+          </p:cNvPr>
+          <p:cNvSpPr>
+            <a:spLocks noGrp="1"/>
+          </p:cNvSpPr>
+          <p:nvPr>
+            <p:ph type="ftr" sz="quarter" idx="11"/>
           </p:nvPr>
         </p:nvSpPr>
         <p:spPr/>
@@ -4566,35 +4622,10 @@
       </p:sp>
       <p:sp>
         <p:nvSpPr>
-          <p:cNvPr id="4" name="Marcador de pie de página 3">
-            <a:extLst>
-              <a:ext uri="{FF2B5EF4-FFF2-40B4-BE49-F238E27FC236}">
-                <a16:creationId xmlns:a16="http://schemas.microsoft.com/office/drawing/2014/main" id="{EDA65846-67A9-C57F-727A-4F0BC604DE86}"/>
-              </a:ext>
-            </a:extLst>
-          </p:cNvPr>
-          <p:cNvSpPr>
-            <a:spLocks noGrp="1"/>
-          </p:cNvSpPr>
-          <p:nvPr>
-            <p:ph type="ftr" sz="quarter" idx="11"/>
-          </p:nvPr>
-        </p:nvSpPr>
-        <p:spPr/>
-        <p:txBody>
-          <a:bodyPr/>
-          <a:lstStyle/>
-          <a:p>
-            <a:endParaRPr lang="es-ES"/>
-          </a:p>
-        </p:txBody>
-      </p:sp>
-      <p:sp>
-        <p:nvSpPr>
           <p:cNvPr id="5" name="Marcador de número de diapositiva 4">
             <a:extLst>
               <a:ext uri="{FF2B5EF4-FFF2-40B4-BE49-F238E27FC236}">
-                <a16:creationId xmlns:a16="http://schemas.microsoft.com/office/drawing/2014/main" id="{E77688B4-AF57-6B26-75DB-427D7A7CA488}"/>
+                <a16:creationId xmlns:a16="http://schemas.microsoft.com/office/drawing/2014/main" id="{09576268-F29F-4428-69BD-634D379C4800}"/>
               </a:ext>
             </a:extLst>
           </p:cNvPr>
@@ -4618,10 +4649,298 @@
           </a:p>
         </p:txBody>
       </p:sp>
+      <p:graphicFrame>
+        <p:nvGraphicFramePr>
+          <p:cNvPr id="12" name="Marcador de contenido 11">
+            <a:extLst>
+              <a:ext uri="{FF2B5EF4-FFF2-40B4-BE49-F238E27FC236}">
+                <a16:creationId xmlns:a16="http://schemas.microsoft.com/office/drawing/2014/main" id="{F6A47BC9-68E2-4ED6-4EDD-B727FD8A68BF}"/>
+              </a:ext>
+            </a:extLst>
+          </p:cNvPr>
+          <p:cNvGraphicFramePr>
+            <a:graphicFrameLocks noGrp="1"/>
+          </p:cNvGraphicFramePr>
+          <p:nvPr>
+            <p:ph idx="1"/>
+            <p:extLst>
+              <p:ext uri="{D42A27DB-BD31-4B8C-83A1-F6EECF244321}">
+                <p14:modId xmlns:p14="http://schemas.microsoft.com/office/powerpoint/2010/main" val="3702794259"/>
+              </p:ext>
+            </p:extLst>
+          </p:nvPr>
+        </p:nvGraphicFramePr>
+        <p:xfrm>
+          <a:off x="838203" y="3183908"/>
+          <a:ext cx="10515597" cy="1854200"/>
+        </p:xfrm>
+        <a:graphic>
+          <a:graphicData uri="http://schemas.openxmlformats.org/drawingml/2006/table">
+            <a:tbl>
+              <a:tblPr firstRow="1" bandRow="1">
+                <a:tableStyleId>{5C22544A-7EE6-4342-B048-85BDC9FD1C3A}</a:tableStyleId>
+              </a:tblPr>
+              <a:tblGrid>
+                <a:gridCol w="3505199">
+                  <a:extLst>
+                    <a:ext uri="{9D8B030D-6E8A-4147-A177-3AD203B41FA5}">
+                      <a16:colId xmlns:a16="http://schemas.microsoft.com/office/drawing/2014/main" val="1878961963"/>
+                    </a:ext>
+                  </a:extLst>
+                </a:gridCol>
+                <a:gridCol w="3505199">
+                  <a:extLst>
+                    <a:ext uri="{9D8B030D-6E8A-4147-A177-3AD203B41FA5}">
+                      <a16:colId xmlns:a16="http://schemas.microsoft.com/office/drawing/2014/main" val="2600129029"/>
+                    </a:ext>
+                  </a:extLst>
+                </a:gridCol>
+                <a:gridCol w="3505199">
+                  <a:extLst>
+                    <a:ext uri="{9D8B030D-6E8A-4147-A177-3AD203B41FA5}">
+                      <a16:colId xmlns:a16="http://schemas.microsoft.com/office/drawing/2014/main" val="1910964036"/>
+                    </a:ext>
+                  </a:extLst>
+                </a:gridCol>
+              </a:tblGrid>
+              <a:tr h="370840">
+                <a:tc>
+                  <a:txBody>
+                    <a:bodyPr/>
+                    <a:lstStyle/>
+                    <a:p>
+                      <a:r>
+                        <a:rPr lang="es-ES" dirty="0"/>
+                        <a:t>Métrica</a:t>
+                      </a:r>
+                    </a:p>
+                  </a:txBody>
+                  <a:tcPr/>
+                </a:tc>
+                <a:tc>
+                  <a:txBody>
+                    <a:bodyPr/>
+                    <a:lstStyle/>
+                    <a:p>
+                      <a:r>
+                        <a:rPr lang="es-ES" dirty="0"/>
+                        <a:t>11 °C</a:t>
+                      </a:r>
+                    </a:p>
+                  </a:txBody>
+                  <a:tcPr/>
+                </a:tc>
+                <a:tc>
+                  <a:txBody>
+                    <a:bodyPr/>
+                    <a:lstStyle/>
+                    <a:p>
+                      <a:r>
+                        <a:rPr lang="es-ES" dirty="0"/>
+                        <a:t>60 °C</a:t>
+                      </a:r>
+                    </a:p>
+                  </a:txBody>
+                  <a:tcPr/>
+                </a:tc>
+                <a:extLst>
+                  <a:ext uri="{0D108BD9-81ED-4DB2-BD59-A6C34878D82A}">
+                    <a16:rowId xmlns:a16="http://schemas.microsoft.com/office/drawing/2014/main" val="3836626119"/>
+                  </a:ext>
+                </a:extLst>
+              </a:tr>
+              <a:tr h="370840">
+                <a:tc>
+                  <a:txBody>
+                    <a:bodyPr/>
+                    <a:lstStyle/>
+                    <a:p>
+                      <a:r>
+                        <a:rPr lang="es-ES" dirty="0"/>
+                        <a:t>Error Ganancia</a:t>
+                      </a:r>
+                    </a:p>
+                  </a:txBody>
+                  <a:tcPr/>
+                </a:tc>
+                <a:tc>
+                  <a:txBody>
+                    <a:bodyPr/>
+                    <a:lstStyle/>
+                    <a:p>
+                      <a:r>
+                        <a:rPr lang="es-ES" dirty="0"/>
+                        <a:t>~ 1 LSB</a:t>
+                      </a:r>
+                    </a:p>
+                  </a:txBody>
+                  <a:tcPr/>
+                </a:tc>
+                <a:tc>
+                  <a:txBody>
+                    <a:bodyPr/>
+                    <a:lstStyle/>
+                    <a:p>
+                      <a:r>
+                        <a:rPr lang="es-ES" dirty="0"/>
+                        <a:t>~ 1 LSB</a:t>
+                      </a:r>
+                    </a:p>
+                  </a:txBody>
+                  <a:tcPr/>
+                </a:tc>
+                <a:extLst>
+                  <a:ext uri="{0D108BD9-81ED-4DB2-BD59-A6C34878D82A}">
+                    <a16:rowId xmlns:a16="http://schemas.microsoft.com/office/drawing/2014/main" val="3228753223"/>
+                  </a:ext>
+                </a:extLst>
+              </a:tr>
+              <a:tr h="370840">
+                <a:tc>
+                  <a:txBody>
+                    <a:bodyPr/>
+                    <a:lstStyle/>
+                    <a:p>
+                      <a:r>
+                        <a:rPr lang="es-ES" dirty="0"/>
+                        <a:t>Error Offset</a:t>
+                      </a:r>
+                    </a:p>
+                  </a:txBody>
+                  <a:tcPr/>
+                </a:tc>
+                <a:tc>
+                  <a:txBody>
+                    <a:bodyPr/>
+                    <a:lstStyle/>
+                    <a:p>
+                      <a:r>
+                        <a:rPr lang="es-ES" dirty="0"/>
+                        <a:t>17LSB</a:t>
+                      </a:r>
+                    </a:p>
+                  </a:txBody>
+                  <a:tcPr/>
+                </a:tc>
+                <a:tc>
+                  <a:txBody>
+                    <a:bodyPr/>
+                    <a:lstStyle/>
+                    <a:p>
+                      <a:r>
+                        <a:rPr lang="es-ES" dirty="0"/>
+                        <a:t>39 LSB</a:t>
+                      </a:r>
+                    </a:p>
+                  </a:txBody>
+                  <a:tcPr/>
+                </a:tc>
+                <a:extLst>
+                  <a:ext uri="{0D108BD9-81ED-4DB2-BD59-A6C34878D82A}">
+                    <a16:rowId xmlns:a16="http://schemas.microsoft.com/office/drawing/2014/main" val="3406856203"/>
+                  </a:ext>
+                </a:extLst>
+              </a:tr>
+              <a:tr h="370840">
+                <a:tc>
+                  <a:txBody>
+                    <a:bodyPr/>
+                    <a:lstStyle/>
+                    <a:p>
+                      <a:r>
+                        <a:rPr lang="es-ES" dirty="0"/>
+                        <a:t>INL</a:t>
+                      </a:r>
+                    </a:p>
+                  </a:txBody>
+                  <a:tcPr/>
+                </a:tc>
+                <a:tc>
+                  <a:txBody>
+                    <a:bodyPr/>
+                    <a:lstStyle/>
+                    <a:p>
+                      <a:r>
+                        <a:rPr lang="es-ES" dirty="0"/>
+                        <a:t>8 LSB</a:t>
+                      </a:r>
+                    </a:p>
+                  </a:txBody>
+                  <a:tcPr/>
+                </a:tc>
+                <a:tc>
+                  <a:txBody>
+                    <a:bodyPr/>
+                    <a:lstStyle/>
+                    <a:p>
+                      <a:r>
+                        <a:rPr lang="es-ES" dirty="0"/>
+                        <a:t>25 LSB</a:t>
+                      </a:r>
+                    </a:p>
+                  </a:txBody>
+                  <a:tcPr/>
+                </a:tc>
+                <a:extLst>
+                  <a:ext uri="{0D108BD9-81ED-4DB2-BD59-A6C34878D82A}">
+                    <a16:rowId xmlns:a16="http://schemas.microsoft.com/office/drawing/2014/main" val="3497477717"/>
+                  </a:ext>
+                </a:extLst>
+              </a:tr>
+              <a:tr h="370840">
+                <a:tc>
+                  <a:txBody>
+                    <a:bodyPr/>
+                    <a:lstStyle/>
+                    <a:p>
+                      <a:r>
+                        <a:rPr lang="es-ES" dirty="0"/>
+                        <a:t>DNL</a:t>
+                      </a:r>
+                    </a:p>
+                  </a:txBody>
+                  <a:tcPr/>
+                </a:tc>
+                <a:tc>
+                  <a:txBody>
+                    <a:bodyPr/>
+                    <a:lstStyle/>
+                    <a:p>
+                      <a:r>
+                        <a:rPr lang="es-ES" dirty="0"/>
+                        <a:t>2 LSB</a:t>
+                      </a:r>
+                    </a:p>
+                  </a:txBody>
+                  <a:tcPr/>
+                </a:tc>
+                <a:tc>
+                  <a:txBody>
+                    <a:bodyPr/>
+                    <a:lstStyle/>
+                    <a:p>
+                      <a:r>
+                        <a:rPr lang="es-ES" dirty="0"/>
+                        <a:t>2,5 LSB</a:t>
+                      </a:r>
+                    </a:p>
+                  </a:txBody>
+                  <a:tcPr/>
+                </a:tc>
+                <a:extLst>
+                  <a:ext uri="{0D108BD9-81ED-4DB2-BD59-A6C34878D82A}">
+                    <a16:rowId xmlns:a16="http://schemas.microsoft.com/office/drawing/2014/main" val="1493067466"/>
+                  </a:ext>
+                </a:extLst>
+              </a:tr>
+            </a:tbl>
+          </a:graphicData>
+        </a:graphic>
+      </p:graphicFrame>
     </p:spTree>
     <p:extLst>
       <p:ext uri="{BB962C8B-B14F-4D97-AF65-F5344CB8AC3E}">
-        <p14:creationId xmlns:p14="http://schemas.microsoft.com/office/powerpoint/2010/main" val="1144930436"/>
+        <p14:creationId xmlns:p14="http://schemas.microsoft.com/office/powerpoint/2010/main" val="1004838355"/>
       </p:ext>
     </p:extLst>
   </p:cSld>
@@ -4653,7 +4972,7 @@
           <p:cNvPr id="2" name="Título 1">
             <a:extLst>
               <a:ext uri="{FF2B5EF4-FFF2-40B4-BE49-F238E27FC236}">
-                <a16:creationId xmlns:a16="http://schemas.microsoft.com/office/drawing/2014/main" id="{B6731A3A-2D36-DC4F-0622-FA972F93D7A2}"/>
+                <a16:creationId xmlns:a16="http://schemas.microsoft.com/office/drawing/2014/main" id="{B0D9EA71-C5CF-03D7-9312-C0F67B0ADC0D}"/>
               </a:ext>
             </a:extLst>
           </p:cNvPr>
@@ -4676,20 +4995,263 @@
           </a:p>
         </p:txBody>
       </p:sp>
-      <p:sp>
-        <p:nvSpPr>
-          <p:cNvPr id="3" name="Marcador de contenido 2">
-            <a:extLst>
-              <a:ext uri="{FF2B5EF4-FFF2-40B4-BE49-F238E27FC236}">
-                <a16:creationId xmlns:a16="http://schemas.microsoft.com/office/drawing/2014/main" id="{A1C26B0C-1EED-5ABE-8BBB-EB74ADCDE541}"/>
-              </a:ext>
-            </a:extLst>
-          </p:cNvPr>
-          <p:cNvSpPr>
-            <a:spLocks noGrp="1"/>
-          </p:cNvSpPr>
+      <p:graphicFrame>
+        <p:nvGraphicFramePr>
+          <p:cNvPr id="6" name="Marcador de contenido 5">
+            <a:extLst>
+              <a:ext uri="{FF2B5EF4-FFF2-40B4-BE49-F238E27FC236}">
+                <a16:creationId xmlns:a16="http://schemas.microsoft.com/office/drawing/2014/main" id="{6F25862F-EAF9-3CF1-5406-79183E132383}"/>
+              </a:ext>
+            </a:extLst>
+          </p:cNvPr>
+          <p:cNvGraphicFramePr>
+            <a:graphicFrameLocks noGrp="1"/>
+          </p:cNvGraphicFramePr>
           <p:nvPr>
             <p:ph idx="1"/>
+            <p:extLst>
+              <p:ext uri="{D42A27DB-BD31-4B8C-83A1-F6EECF244321}">
+                <p14:modId xmlns:p14="http://schemas.microsoft.com/office/powerpoint/2010/main" val="712065813"/>
+              </p:ext>
+            </p:extLst>
+          </p:nvPr>
+        </p:nvGraphicFramePr>
+        <p:xfrm>
+          <a:off x="838203" y="3610036"/>
+          <a:ext cx="10515597" cy="1483360"/>
+        </p:xfrm>
+        <a:graphic>
+          <a:graphicData uri="http://schemas.openxmlformats.org/drawingml/2006/table">
+            <a:tbl>
+              <a:tblPr firstRow="1" bandRow="1">
+                <a:tableStyleId>{5C22544A-7EE6-4342-B048-85BDC9FD1C3A}</a:tableStyleId>
+              </a:tblPr>
+              <a:tblGrid>
+                <a:gridCol w="3505199">
+                  <a:extLst>
+                    <a:ext uri="{9D8B030D-6E8A-4147-A177-3AD203B41FA5}">
+                      <a16:colId xmlns:a16="http://schemas.microsoft.com/office/drawing/2014/main" val="2732656424"/>
+                    </a:ext>
+                  </a:extLst>
+                </a:gridCol>
+                <a:gridCol w="3505199">
+                  <a:extLst>
+                    <a:ext uri="{9D8B030D-6E8A-4147-A177-3AD203B41FA5}">
+                      <a16:colId xmlns:a16="http://schemas.microsoft.com/office/drawing/2014/main" val="1270858815"/>
+                    </a:ext>
+                  </a:extLst>
+                </a:gridCol>
+                <a:gridCol w="3505199">
+                  <a:extLst>
+                    <a:ext uri="{9D8B030D-6E8A-4147-A177-3AD203B41FA5}">
+                      <a16:colId xmlns:a16="http://schemas.microsoft.com/office/drawing/2014/main" val="63029011"/>
+                    </a:ext>
+                  </a:extLst>
+                </a:gridCol>
+              </a:tblGrid>
+              <a:tr h="370840">
+                <a:tc>
+                  <a:txBody>
+                    <a:bodyPr/>
+                    <a:lstStyle/>
+                    <a:p>
+                      <a:r>
+                        <a:rPr lang="es-ES" dirty="0"/>
+                        <a:t>Métrica</a:t>
+                      </a:r>
+                    </a:p>
+                  </a:txBody>
+                  <a:tcPr/>
+                </a:tc>
+                <a:tc>
+                  <a:txBody>
+                    <a:bodyPr/>
+                    <a:lstStyle/>
+                    <a:p>
+                      <a:r>
+                        <a:rPr lang="es-ES" dirty="0"/>
+                        <a:t>Medido</a:t>
+                      </a:r>
+                    </a:p>
+                  </a:txBody>
+                  <a:tcPr/>
+                </a:tc>
+                <a:tc>
+                  <a:txBody>
+                    <a:bodyPr/>
+                    <a:lstStyle/>
+                    <a:p>
+                      <a:r>
+                        <a:rPr lang="es-ES" dirty="0" err="1"/>
+                        <a:t>Datasheet</a:t>
+                      </a:r>
+                      <a:endParaRPr lang="es-ES" dirty="0"/>
+                    </a:p>
+                  </a:txBody>
+                  <a:tcPr/>
+                </a:tc>
+                <a:extLst>
+                  <a:ext uri="{0D108BD9-81ED-4DB2-BD59-A6C34878D82A}">
+                    <a16:rowId xmlns:a16="http://schemas.microsoft.com/office/drawing/2014/main" val="3302873435"/>
+                  </a:ext>
+                </a:extLst>
+              </a:tr>
+              <a:tr h="370840">
+                <a:tc>
+                  <a:txBody>
+                    <a:bodyPr/>
+                    <a:lstStyle/>
+                    <a:p>
+                      <a:r>
+                        <a:rPr lang="es-ES" dirty="0"/>
+                        <a:t>THD</a:t>
+                      </a:r>
+                    </a:p>
+                  </a:txBody>
+                  <a:tcPr/>
+                </a:tc>
+                <a:tc>
+                  <a:txBody>
+                    <a:bodyPr/>
+                    <a:lstStyle/>
+                    <a:p>
+                      <a:r>
+                        <a:rPr lang="es-ES" dirty="0"/>
+                        <a:t>-49,7</a:t>
+                      </a:r>
+                    </a:p>
+                  </a:txBody>
+                  <a:tcPr/>
+                </a:tc>
+                <a:tc>
+                  <a:txBody>
+                    <a:bodyPr/>
+                    <a:lstStyle/>
+                    <a:p>
+                      <a:r>
+                        <a:rPr lang="es-ES" dirty="0"/>
+                        <a:t>-67</a:t>
+                      </a:r>
+                    </a:p>
+                  </a:txBody>
+                  <a:tcPr/>
+                </a:tc>
+                <a:extLst>
+                  <a:ext uri="{0D108BD9-81ED-4DB2-BD59-A6C34878D82A}">
+                    <a16:rowId xmlns:a16="http://schemas.microsoft.com/office/drawing/2014/main" val="2563244051"/>
+                  </a:ext>
+                </a:extLst>
+              </a:tr>
+              <a:tr h="370840">
+                <a:tc>
+                  <a:txBody>
+                    <a:bodyPr/>
+                    <a:lstStyle/>
+                    <a:p>
+                      <a:r>
+                        <a:rPr lang="es-ES" dirty="0"/>
+                        <a:t>SINAD</a:t>
+                      </a:r>
+                    </a:p>
+                  </a:txBody>
+                  <a:tcPr/>
+                </a:tc>
+                <a:tc>
+                  <a:txBody>
+                    <a:bodyPr/>
+                    <a:lstStyle/>
+                    <a:p>
+                      <a:r>
+                        <a:rPr lang="es-ES" dirty="0"/>
+                        <a:t>35,63</a:t>
+                      </a:r>
+                    </a:p>
+                  </a:txBody>
+                  <a:tcPr/>
+                </a:tc>
+                <a:tc>
+                  <a:txBody>
+                    <a:bodyPr/>
+                    <a:lstStyle/>
+                    <a:p>
+                      <a:r>
+                        <a:rPr lang="es-ES" dirty="0"/>
+                        <a:t>64</a:t>
+                      </a:r>
+                    </a:p>
+                  </a:txBody>
+                  <a:tcPr/>
+                </a:tc>
+                <a:extLst>
+                  <a:ext uri="{0D108BD9-81ED-4DB2-BD59-A6C34878D82A}">
+                    <a16:rowId xmlns:a16="http://schemas.microsoft.com/office/drawing/2014/main" val="107105481"/>
+                  </a:ext>
+                </a:extLst>
+              </a:tr>
+              <a:tr h="370840">
+                <a:tc>
+                  <a:txBody>
+                    <a:bodyPr/>
+                    <a:lstStyle/>
+                    <a:p>
+                      <a:r>
+                        <a:rPr lang="es-ES" dirty="0"/>
+                        <a:t>ENOB</a:t>
+                      </a:r>
+                    </a:p>
+                  </a:txBody>
+                  <a:tcPr/>
+                </a:tc>
+                <a:tc>
+                  <a:txBody>
+                    <a:bodyPr/>
+                    <a:lstStyle/>
+                    <a:p>
+                      <a:r>
+                        <a:rPr lang="es-ES" dirty="0"/>
+                        <a:t>10</a:t>
+                      </a:r>
+                    </a:p>
+                  </a:txBody>
+                  <a:tcPr/>
+                </a:tc>
+                <a:tc>
+                  <a:txBody>
+                    <a:bodyPr/>
+                    <a:lstStyle/>
+                    <a:p>
+                      <a:r>
+                        <a:rPr lang="es-ES" dirty="0"/>
+                        <a:t>5,63</a:t>
+                      </a:r>
+                    </a:p>
+                  </a:txBody>
+                  <a:tcPr/>
+                </a:tc>
+                <a:extLst>
+                  <a:ext uri="{0D108BD9-81ED-4DB2-BD59-A6C34878D82A}">
+                    <a16:rowId xmlns:a16="http://schemas.microsoft.com/office/drawing/2014/main" val="29849741"/>
+                  </a:ext>
+                </a:extLst>
+              </a:tr>
+            </a:tbl>
+          </a:graphicData>
+        </a:graphic>
+      </p:graphicFrame>
+      <p:sp>
+        <p:nvSpPr>
+          <p:cNvPr id="4" name="Marcador de pie de página 3">
+            <a:extLst>
+              <a:ext uri="{FF2B5EF4-FFF2-40B4-BE49-F238E27FC236}">
+                <a16:creationId xmlns:a16="http://schemas.microsoft.com/office/drawing/2014/main" id="{EDA65846-67A9-C57F-727A-4F0BC604DE86}"/>
+              </a:ext>
+            </a:extLst>
+          </p:cNvPr>
+          <p:cNvSpPr>
+            <a:spLocks noGrp="1"/>
+          </p:cNvSpPr>
+          <p:nvPr>
+            <p:ph type="ftr" sz="quarter" idx="11"/>
           </p:nvPr>
         </p:nvSpPr>
         <p:spPr/>
@@ -4703,35 +5265,10 @@
       </p:sp>
       <p:sp>
         <p:nvSpPr>
-          <p:cNvPr id="4" name="Marcador de pie de página 3">
-            <a:extLst>
-              <a:ext uri="{FF2B5EF4-FFF2-40B4-BE49-F238E27FC236}">
-                <a16:creationId xmlns:a16="http://schemas.microsoft.com/office/drawing/2014/main" id="{DB0CF561-D925-1E69-AED9-0997E2DA7129}"/>
-              </a:ext>
-            </a:extLst>
-          </p:cNvPr>
-          <p:cNvSpPr>
-            <a:spLocks noGrp="1"/>
-          </p:cNvSpPr>
-          <p:nvPr>
-            <p:ph type="ftr" sz="quarter" idx="11"/>
-          </p:nvPr>
-        </p:nvSpPr>
-        <p:spPr/>
-        <p:txBody>
-          <a:bodyPr/>
-          <a:lstStyle/>
-          <a:p>
-            <a:endParaRPr lang="es-ES"/>
-          </a:p>
-        </p:txBody>
-      </p:sp>
-      <p:sp>
-        <p:nvSpPr>
           <p:cNvPr id="5" name="Marcador de número de diapositiva 4">
             <a:extLst>
               <a:ext uri="{FF2B5EF4-FFF2-40B4-BE49-F238E27FC236}">
-                <a16:creationId xmlns:a16="http://schemas.microsoft.com/office/drawing/2014/main" id="{ED77A79B-8BF3-C3B0-F67E-4E1DBDC60227}"/>
+                <a16:creationId xmlns:a16="http://schemas.microsoft.com/office/drawing/2014/main" id="{E77688B4-AF57-6B26-75DB-427D7A7CA488}"/>
               </a:ext>
             </a:extLst>
           </p:cNvPr>
@@ -4758,7 +5295,7 @@
     </p:spTree>
     <p:extLst>
       <p:ext uri="{BB962C8B-B14F-4D97-AF65-F5344CB8AC3E}">
-        <p14:creationId xmlns:p14="http://schemas.microsoft.com/office/powerpoint/2010/main" val="3122463411"/>
+        <p14:creationId xmlns:p14="http://schemas.microsoft.com/office/powerpoint/2010/main" val="1144930436"/>
       </p:ext>
     </p:extLst>
   </p:cSld>
@@ -4808,7 +5345,7 @@
           <a:p>
             <a:r>
               <a:rPr lang="es-ES" dirty="0"/>
-              <a:t>Trabajo durante receso:</a:t>
+              <a:t>Trabajo para esta semana:</a:t>
             </a:r>
           </a:p>
         </p:txBody>
@@ -4840,7 +5377,7 @@
             </a:pPr>
             <a:r>
               <a:rPr lang="es-ES" dirty="0"/>
-              <a:t>Métricas DC ADC del ESP32</a:t>
+              <a:t>Métricas completas ESP32</a:t>
             </a:r>
           </a:p>
           <a:p>
@@ -4850,7 +5387,7 @@
             </a:pPr>
             <a:r>
               <a:rPr lang="es-ES" dirty="0"/>
-              <a:t>Métricas AC de los ADC de ambas tarjetas</a:t>
+              <a:t>Calibración de tarjetas</a:t>
             </a:r>
           </a:p>
           <a:p>
@@ -4860,17 +5397,7 @@
             </a:pPr>
             <a:r>
               <a:rPr lang="es-ES" dirty="0"/>
-              <a:t>Comparativa post calibrado</a:t>
-            </a:r>
-          </a:p>
-          <a:p>
-            <a:pPr marL="457200" indent="-457200">
-              <a:buFont typeface="+mj-lt"/>
-              <a:buAutoNum type="arabicPeriod"/>
-            </a:pPr>
-            <a:r>
-              <a:rPr lang="es-ES" dirty="0"/>
-              <a:t>Documentar curva de transferencia al calentar las tarjetas</a:t>
+              <a:t>Cambio de instrumentación</a:t>
             </a:r>
           </a:p>
         </p:txBody>
